--- a/classes/parte-0-fundamentos-y-prerrequisitos/014-direccionamiento-ip-y-subnetting/clase-014-presentacion.pptx
+++ b/classes/parte-0-fundamentos-y-prerrequisitos/014-direccionamiento-ip-y-subnetting/clase-014-presentacion.pptx
@@ -17,6 +17,9 @@
     <p:sldId id="265" r:id="rId16"/>
     <p:sldId id="266" r:id="rId17"/>
     <p:sldId id="267" r:id="rId18"/>
+    <p:sldId id="268" r:id="rId19"/>
+    <p:sldId id="269" r:id="rId20"/>
+    <p:sldId id="270" r:id="rId21"/>
   </p:sldIdLst>
   <p:sldSz cx="9144000" cy="6858000" type="screen4x3"/>
   <p:notesSz cx="6858000" cy="9144000"/>
@@ -3198,7 +3201,7 @@
                   <a:srgbClr val="0B3D2E"/>
                 </a:solidFill>
               </a:rPr>
-              <a:t>⚠️ Errores comunes</a:t>
+              <a:t>✍️ Ejercicios</a:t>
             </a:r>
           </a:p>
         </p:txBody>
@@ -3236,67 +3239,97 @@
                   <a:srgbClr val="22282E"/>
                 </a:solidFill>
               </a:rPr>
-              <a:t>•  Olvidar restar red y broadcast — Los hosts utilizables son 2^n − 2, no 2^n.</a:t>
-            </a:r>
-          </a:p>
-          <a:p>
-            <a:pPr>
-              <a:spcAft>
-                <a:spcPts val="600"/>
-              </a:spcAft>
-            </a:pPr>
-            <a:r>
-              <a:rPr sz="1500">
-                <a:solidFill>
-                  <a:srgbClr val="22282E"/>
-                </a:solidFill>
-              </a:rPr>
-              <a:t>•  Subredes solapadas en VLSM — Asignaste sin ordenar por tamaño. Empieza por la subred más grande.</a:t>
-            </a:r>
-          </a:p>
-          <a:p>
-            <a:pPr>
-              <a:spcAft>
-                <a:spcPts val="600"/>
-              </a:spcAft>
-            </a:pPr>
-            <a:r>
-              <a:rPr sz="1500">
-                <a:solidFill>
-                  <a:srgbClr val="22282E"/>
-                </a:solidFill>
-              </a:rPr>
-              <a:t>•  Confundir /24 con 255.255.0.0 — /24 es 255.255.255.0. Cuenta los bits a 1.</a:t>
-            </a:r>
-          </a:p>
-          <a:p>
-            <a:pPr>
-              <a:spcAft>
-                <a:spcPts val="600"/>
-              </a:spcAft>
-            </a:pPr>
-            <a:r>
-              <a:rPr sz="1500">
-                <a:solidFill>
-                  <a:srgbClr val="22282E"/>
-                </a:solidFill>
-              </a:rPr>
-              <a:t>•  Poner un host en la dirección de red o broadcast — No son asignables (salvo /31, /32). Usa el rango intermedio.</a:t>
-            </a:r>
-          </a:p>
-          <a:p>
-            <a:pPr>
-              <a:spcAft>
-                <a:spcPts val="600"/>
-              </a:spcAft>
-            </a:pPr>
-            <a:r>
-              <a:rPr sz="1500">
-                <a:solidFill>
-                  <a:srgbClr val="22282E"/>
-                </a:solidFill>
-              </a:rPr>
-              <a:t>•  Mezclar bits de red al subnetear — Trabaja en binario para ver claramente la frontera red/host.</a:t>
+              <a:t>•  ¿Cuántos hosts utilizables tiene un /22? ¿Y un /30?</a:t>
+            </a:r>
+          </a:p>
+          <a:p>
+            <a:pPr>
+              <a:spcAft>
+                <a:spcPts val="600"/>
+              </a:spcAft>
+            </a:pPr>
+            <a:r>
+              <a:rPr sz="1500">
+                <a:solidFill>
+                  <a:srgbClr val="22282E"/>
+                </a:solidFill>
+              </a:rPr>
+              <a:t>•  Para 10.20.30.45/27, calcula la dirección de red y la de broadcast.</a:t>
+            </a:r>
+          </a:p>
+          <a:p>
+            <a:pPr>
+              <a:spcAft>
+                <a:spcPts val="600"/>
+              </a:spcAft>
+            </a:pPr>
+            <a:r>
+              <a:rPr sz="1500">
+                <a:solidFill>
+                  <a:srgbClr val="22282E"/>
+                </a:solidFill>
+              </a:rPr>
+              <a:t>•  Divide 192.168.100.0/24 en 8 subredes y da la 3ª subred completa (red, rango y broadcast).</a:t>
+            </a:r>
+          </a:p>
+          <a:p>
+            <a:pPr>
+              <a:spcAft>
+                <a:spcPts val="600"/>
+              </a:spcAft>
+            </a:pPr>
+            <a:r>
+              <a:rPr sz="1500">
+                <a:solidFill>
+                  <a:srgbClr val="22282E"/>
+                </a:solidFill>
+              </a:rPr>
+              <a:t>•  Diseña con VLSM un plan para tres departamentos de 60, 30 y 10 hosts partiendo de un /24.</a:t>
+            </a:r>
+          </a:p>
+          <a:p>
+            <a:pPr>
+              <a:spcAft>
+                <a:spcPts val="600"/>
+              </a:spcAft>
+            </a:pPr>
+            <a:r>
+              <a:rPr sz="1500">
+                <a:solidFill>
+                  <a:srgbClr val="22282E"/>
+                </a:solidFill>
+              </a:rPr>
+              <a:t>•  Explica por qué un /31 puede usarse en enlaces punto a punto pese a la regla −2.</a:t>
+            </a:r>
+          </a:p>
+          <a:p>
+            <a:pPr>
+              <a:spcAft>
+                <a:spcPts val="600"/>
+              </a:spcAft>
+            </a:pPr>
+            <a:r>
+              <a:rPr sz="1500">
+                <a:solidFill>
+                  <a:srgbClr val="22282E"/>
+                </a:solidFill>
+              </a:rPr>
+              <a:t>•  Determina si 192.168.5.130 y 192.168.5.200 están en la misma subred /26.</a:t>
+            </a:r>
+          </a:p>
+          <a:p>
+            <a:pPr>
+              <a:spcAft>
+                <a:spcPts val="600"/>
+              </a:spcAft>
+            </a:pPr>
+            <a:r>
+              <a:rPr sz="1500">
+                <a:solidFill>
+                  <a:srgbClr val="22282E"/>
+                </a:solidFill>
+              </a:rPr>
+              <a:t>•  Justifica con un ejemplo por qué equivocarse de máscara altera el alcance de un escaneo.</a:t>
             </a:r>
           </a:p>
         </p:txBody>
@@ -3347,7 +3380,7 @@
                   <a:srgbClr val="0B3D2E"/>
                 </a:solidFill>
               </a:rPr>
-              <a:t>❓ Preguntas frecuentes</a:t>
+              <a:t>📝 Reto verificable</a:t>
             </a:r>
           </a:p>
         </p:txBody>
@@ -3385,52 +3418,22 @@
                   <a:srgbClr val="22282E"/>
                 </a:solidFill>
               </a:rPr>
-              <a:t>•  ❓ ¿Por qué importa el subnetting en seguridad? Define el alcance: un /24 son 254 hosts a escanear; equivocarte de máscara deja objetivos fuera o incluye redes que no debías tocar. También es la base de la segmentación defensiva.</a:t>
-            </a:r>
-          </a:p>
-          <a:p>
-            <a:pPr>
-              <a:spcAft>
-                <a:spcPts val="600"/>
-              </a:spcAft>
-            </a:pPr>
-            <a:r>
-              <a:rPr sz="1500">
-                <a:solidFill>
-                  <a:srgbClr val="22282E"/>
-                </a:solidFill>
-              </a:rPr>
-              <a:t>•  ❓ ¿Sigo necesitando saber esto con IPv6? IPv6 usa prefijos igual (p. ej. /64), aunque el cálculo de hosts cambia por su tamaño. Los conceptos de red/prefijo se trasladan.</a:t>
-            </a:r>
-          </a:p>
-          <a:p>
-            <a:pPr>
-              <a:spcAft>
-                <a:spcPts val="600"/>
-              </a:spcAft>
-            </a:pPr>
-            <a:r>
-              <a:rPr sz="1500">
-                <a:solidFill>
-                  <a:srgbClr val="22282E"/>
-                </a:solidFill>
-              </a:rPr>
-              <a:t>•  ❓ ¿Puedo usar siempre una calculadora? Para trabajar sí, pero entender el cálculo te permite razonar rangos al vuelo durante un pentest y detectar errores de la herramienta.</a:t>
-            </a:r>
-          </a:p>
-          <a:p>
-            <a:pPr>
-              <a:spcAft>
-                <a:spcPts val="600"/>
-              </a:spcAft>
-            </a:pPr>
-            <a:r>
-              <a:rPr sz="1500">
-                <a:solidFill>
-                  <a:srgbClr val="22282E"/>
-                </a:solidFill>
-              </a:rPr>
-              <a:t>•  ❓ ¿Qué es APIPA (169.254.x.x)? Direcciones autoasignadas cuando falla DHCP. Verlas suele indicar un problema de red, útil como señal diagnóstica.</a:t>
+              <a:t>•  Diseña un plan de direccionamiento para una organización ficticia con cuatro segmentos de distinto tamaño (por ejemplo 200, 60 y 12 hosts y un enlace WAN de 2) partiendo de un único bloque /23…</a:t>
+            </a:r>
+          </a:p>
+          <a:p>
+            <a:pPr>
+              <a:spcAft>
+                <a:spcPts val="600"/>
+              </a:spcAft>
+            </a:pPr>
+            <a:r>
+              <a:rPr sz="1500">
+                <a:solidFill>
+                  <a:srgbClr val="22282E"/>
+                </a:solidFill>
+              </a:rPr>
+              <a:t>•  Criterio de aceptación: las subredes no se solapan, cada una tiene la máscara mínima que satisface su número de hosts, y la suma cabe dentro del /23 asignado. El plan es verificable con ipcalc o…</a:t>
             </a:r>
           </a:p>
         </p:txBody>
@@ -3481,7 +3484,7 @@
                   <a:srgbClr val="0B3D2E"/>
                 </a:solidFill>
               </a:rPr>
-              <a:t>🔗 Referencias</a:t>
+              <a:t>⚠️ Errores comunes</a:t>
             </a:r>
           </a:p>
         </p:txBody>
@@ -3519,22 +3522,335 @@
                   <a:srgbClr val="22282E"/>
                 </a:solidFill>
               </a:rPr>
-              <a:t>•  RFC 4632 (CIDR) — &lt;https://www.rfc-editor.org/rfc/rfc4632&gt;</a:t>
-            </a:r>
-          </a:p>
-          <a:p>
-            <a:pPr>
-              <a:spcAft>
-                <a:spcPts val="600"/>
-              </a:spcAft>
-            </a:pPr>
-            <a:r>
-              <a:rPr sz="1500">
-                <a:solidFill>
-                  <a:srgbClr val="22282E"/>
-                </a:solidFill>
-              </a:rPr>
-              <a:t>•  RFC 1918 (direcciones privadas) — &lt;https://www.rfc-editor.org/rfc/rfc1918&gt;</a:t>
+              <a:t>•  Olvidar restar red y broadcast — Los hosts utilizables son 2^n − 2, no 2^n. Réstalos siempre.</a:t>
+            </a:r>
+          </a:p>
+          <a:p>
+            <a:pPr>
+              <a:spcAft>
+                <a:spcPts val="600"/>
+              </a:spcAft>
+            </a:pPr>
+            <a:r>
+              <a:rPr sz="1500">
+                <a:solidFill>
+                  <a:srgbClr val="22282E"/>
+                </a:solidFill>
+              </a:rPr>
+              <a:t>•  Subredes solapadas en VLSM — Asignaste sin ordenar por tamaño. Empieza por la subred más grande.</a:t>
+            </a:r>
+          </a:p>
+          <a:p>
+            <a:pPr>
+              <a:spcAft>
+                <a:spcPts val="600"/>
+              </a:spcAft>
+            </a:pPr>
+            <a:r>
+              <a:rPr sz="1500">
+                <a:solidFill>
+                  <a:srgbClr val="22282E"/>
+                </a:solidFill>
+              </a:rPr>
+              <a:t>•  Confundir /24 con 255.255.0.0 — /24 es 255.255.255.0. Cuenta los bits a 1 de la máscara.</a:t>
+            </a:r>
+          </a:p>
+          <a:p>
+            <a:pPr>
+              <a:spcAft>
+                <a:spcPts val="600"/>
+              </a:spcAft>
+            </a:pPr>
+            <a:r>
+              <a:rPr sz="1500">
+                <a:solidFill>
+                  <a:srgbClr val="22282E"/>
+                </a:solidFill>
+              </a:rPr>
+              <a:t>•  Poner un host en la dirección de red o broadcast — No son asignables (salvo /31 y /32). Usa el rango intermedio.</a:t>
+            </a:r>
+          </a:p>
+          <a:p>
+            <a:pPr>
+              <a:spcAft>
+                <a:spcPts val="600"/>
+              </a:spcAft>
+            </a:pPr>
+            <a:r>
+              <a:rPr sz="1500">
+                <a:solidFill>
+                  <a:srgbClr val="22282E"/>
+                </a:solidFill>
+              </a:rPr>
+              <a:t>•  Mezclar bits de red al subnetear — Trabaja en binario para ver con claridad la frontera red/host.</a:t>
+            </a:r>
+          </a:p>
+          <a:p>
+            <a:pPr>
+              <a:spcAft>
+                <a:spcPts val="600"/>
+              </a:spcAft>
+            </a:pPr>
+            <a:r>
+              <a:rPr sz="1500">
+                <a:solidFill>
+                  <a:srgbClr val="22282E"/>
+                </a:solidFill>
+              </a:rPr>
+              <a:t>•  El plan VLSM no cabe en el bloque — Sumaste subredes con máscaras demasiado holgadas. Ajusta cada una a su mínimo.</a:t>
+            </a:r>
+          </a:p>
+        </p:txBody>
+      </p:sp>
+    </p:spTree>
+  </p:cSld>
+  <p:clrMapOvr>
+    <a:masterClrMapping/>
+  </p:clrMapOvr>
+</p:sld>
+</file>
+
+<file path=ppt/slides/slide13.xml><?xml version="1.0" encoding="utf-8"?>
+<p:sld xmlns:a="http://schemas.openxmlformats.org/drawingml/2006/main" xmlns:p="http://schemas.openxmlformats.org/presentationml/2006/main" xmlns:r="http://schemas.openxmlformats.org/officeDocument/2006/relationships">
+  <p:cSld>
+    <p:spTree>
+      <p:nvGrpSpPr>
+        <p:cNvPr id="1" name=""/>
+        <p:cNvGrpSpPr/>
+        <p:nvPr/>
+      </p:nvGrpSpPr>
+      <p:grpSpPr/>
+      <p:sp>
+        <p:nvSpPr>
+          <p:cNvPr id="2" name="TextBox 1"/>
+          <p:cNvSpPr txBox="1"/>
+          <p:nvPr/>
+        </p:nvSpPr>
+        <p:spPr>
+          <a:xfrm>
+            <a:off x="457200" y="320040"/>
+            <a:ext cx="8229600" cy="822960"/>
+          </a:xfrm>
+          <a:prstGeom prst="rect">
+            <a:avLst/>
+          </a:prstGeom>
+          <a:noFill/>
+        </p:spPr>
+        <p:txBody>
+          <a:bodyPr wrap="square">
+            <a:spAutoFit/>
+          </a:bodyPr>
+          <a:lstStyle/>
+          <a:p>
+            <a:r>
+              <a:rPr sz="2600" b="1">
+                <a:solidFill>
+                  <a:srgbClr val="0B3D2E"/>
+                </a:solidFill>
+              </a:rPr>
+              <a:t>❓ Preguntas frecuentes</a:t>
+            </a:r>
+          </a:p>
+        </p:txBody>
+      </p:sp>
+      <p:sp>
+        <p:nvSpPr>
+          <p:cNvPr id="3" name="TextBox 2"/>
+          <p:cNvSpPr txBox="1"/>
+          <p:nvPr/>
+        </p:nvSpPr>
+        <p:spPr>
+          <a:xfrm>
+            <a:off x="457200" y="1280160"/>
+            <a:ext cx="8229600" cy="4937760"/>
+          </a:xfrm>
+          <a:prstGeom prst="rect">
+            <a:avLst/>
+          </a:prstGeom>
+          <a:noFill/>
+        </p:spPr>
+        <p:txBody>
+          <a:bodyPr wrap="square">
+            <a:spAutoFit/>
+          </a:bodyPr>
+          <a:lstStyle/>
+          <a:p>
+            <a:pPr>
+              <a:spcAft>
+                <a:spcPts val="600"/>
+              </a:spcAft>
+            </a:pPr>
+            <a:r>
+              <a:rPr sz="1500">
+                <a:solidFill>
+                  <a:srgbClr val="22282E"/>
+                </a:solidFill>
+              </a:rPr>
+              <a:t>•  ❓ ¿Por qué importa el subnetting en seguridad? Define el alcance: un /24 son 254 hosts a escanear, y equivocarse de máscara deja objetivos fuera o incluye redes que no debías tocar. Además es la base…</a:t>
+            </a:r>
+          </a:p>
+          <a:p>
+            <a:pPr>
+              <a:spcAft>
+                <a:spcPts val="600"/>
+              </a:spcAft>
+            </a:pPr>
+            <a:r>
+              <a:rPr sz="1500">
+                <a:solidFill>
+                  <a:srgbClr val="22282E"/>
+                </a:solidFill>
+              </a:rPr>
+              <a:t>•  ❓ ¿Sigo necesitando esto con IPv6? Sí: IPv6 usa prefijos igual (por ejemplo /64), aunque el cálculo de hosts cambia por la magnitud del espacio. Los conceptos de red y prefijo se trasladan…</a:t>
+            </a:r>
+          </a:p>
+          <a:p>
+            <a:pPr>
+              <a:spcAft>
+                <a:spcPts val="600"/>
+              </a:spcAft>
+            </a:pPr>
+            <a:r>
+              <a:rPr sz="1500">
+                <a:solidFill>
+                  <a:srgbClr val="22282E"/>
+                </a:solidFill>
+              </a:rPr>
+              <a:t>•  ❓ ¿Puedo usar siempre una calculadora? Para trabajar, sí; pero entender el cálculo te permite razonar rangos al vuelo durante un pentest y detectar cuándo la herramienta se equivoca o la usas mal.</a:t>
+            </a:r>
+          </a:p>
+          <a:p>
+            <a:pPr>
+              <a:spcAft>
+                <a:spcPts val="600"/>
+              </a:spcAft>
+            </a:pPr>
+            <a:r>
+              <a:rPr sz="1500">
+                <a:solidFill>
+                  <a:srgbClr val="22282E"/>
+                </a:solidFill>
+              </a:rPr>
+              <a:t>•  ❓ ¿Qué es APIPA (169.254.x.x)? Direcciones que un host se autoasigna cuando no consigue respuesta de DHCP. Verlas suele indicar un problema de red, por lo que sirven como señal diagnóstica.</a:t>
+            </a:r>
+          </a:p>
+        </p:txBody>
+      </p:sp>
+    </p:spTree>
+  </p:cSld>
+  <p:clrMapOvr>
+    <a:masterClrMapping/>
+  </p:clrMapOvr>
+</p:sld>
+</file>
+
+<file path=ppt/slides/slide14.xml><?xml version="1.0" encoding="utf-8"?>
+<p:sld xmlns:a="http://schemas.openxmlformats.org/drawingml/2006/main" xmlns:p="http://schemas.openxmlformats.org/presentationml/2006/main" xmlns:r="http://schemas.openxmlformats.org/officeDocument/2006/relationships">
+  <p:cSld>
+    <p:spTree>
+      <p:nvGrpSpPr>
+        <p:cNvPr id="1" name=""/>
+        <p:cNvGrpSpPr/>
+        <p:nvPr/>
+      </p:nvGrpSpPr>
+      <p:grpSpPr/>
+      <p:sp>
+        <p:nvSpPr>
+          <p:cNvPr id="2" name="TextBox 1"/>
+          <p:cNvSpPr txBox="1"/>
+          <p:nvPr/>
+        </p:nvSpPr>
+        <p:spPr>
+          <a:xfrm>
+            <a:off x="457200" y="320040"/>
+            <a:ext cx="8229600" cy="822960"/>
+          </a:xfrm>
+          <a:prstGeom prst="rect">
+            <a:avLst/>
+          </a:prstGeom>
+          <a:noFill/>
+        </p:spPr>
+        <p:txBody>
+          <a:bodyPr wrap="square">
+            <a:spAutoFit/>
+          </a:bodyPr>
+          <a:lstStyle/>
+          <a:p>
+            <a:r>
+              <a:rPr sz="2600" b="1">
+                <a:solidFill>
+                  <a:srgbClr val="0B3D2E"/>
+                </a:solidFill>
+              </a:rPr>
+              <a:t>🔗 Referencias</a:t>
+            </a:r>
+          </a:p>
+        </p:txBody>
+      </p:sp>
+      <p:sp>
+        <p:nvSpPr>
+          <p:cNvPr id="3" name="TextBox 2"/>
+          <p:cNvSpPr txBox="1"/>
+          <p:nvPr/>
+        </p:nvSpPr>
+        <p:spPr>
+          <a:xfrm>
+            <a:off x="457200" y="1280160"/>
+            <a:ext cx="8229600" cy="4937760"/>
+          </a:xfrm>
+          <a:prstGeom prst="rect">
+            <a:avLst/>
+          </a:prstGeom>
+          <a:noFill/>
+        </p:spPr>
+        <p:txBody>
+          <a:bodyPr wrap="square">
+            <a:spAutoFit/>
+          </a:bodyPr>
+          <a:lstStyle/>
+          <a:p>
+            <a:pPr>
+              <a:spcAft>
+                <a:spcPts val="600"/>
+              </a:spcAft>
+            </a:pPr>
+            <a:r>
+              <a:rPr sz="1500">
+                <a:solidFill>
+                  <a:srgbClr val="22282E"/>
+                </a:solidFill>
+              </a:rPr>
+              <a:t>•  RFC 4632 (Classless Inter-Domain Routing) — &lt;https://www.rfc-editor.org/rfc/rfc4632&gt;</a:t>
+            </a:r>
+          </a:p>
+          <a:p>
+            <a:pPr>
+              <a:spcAft>
+                <a:spcPts val="600"/>
+              </a:spcAft>
+            </a:pPr>
+            <a:r>
+              <a:rPr sz="1500">
+                <a:solidFill>
+                  <a:srgbClr val="22282E"/>
+                </a:solidFill>
+              </a:rPr>
+              <a:t>•  RFC 1918 (Address Allocation for Private Internets) — &lt;https://www.rfc-editor.org/rfc/rfc1918&gt;</a:t>
+            </a:r>
+          </a:p>
+          <a:p>
+            <a:pPr>
+              <a:spcAft>
+                <a:spcPts val="600"/>
+              </a:spcAft>
+            </a:pPr>
+            <a:r>
+              <a:rPr sz="1500">
+                <a:solidFill>
+                  <a:srgbClr val="22282E"/>
+                </a:solidFill>
+              </a:rPr>
+              <a:t>•  RFC 3021 (Using 31-Bit Prefixes on IPv4 Point-to-Point Links) — &lt;https://www.rfc-editor.org/rfc/rfc3021&gt;</a:t>
             </a:r>
           </a:p>
           <a:p>
@@ -3564,11 +3880,86 @@
                   <a:srgbClr val="22282E"/>
                 </a:solidFill>
               </a:rPr>
-              <a:t>•  Cisco: Subnetting básico — &lt;https://www.cisco.com/c/en/us/support/docs/ip/routing-information-protocol-rip/13788-3.html&gt;</a:t>
-            </a:r>
-          </a:p>
-        </p:txBody>
-      </p:sp>
+              <a:t>•  Cisco: IP Addressing and Subnetting for New Users — &lt;https://www.cisco.com/c/en/us/support/docs/ip/routing-information-protocol-rip/13788-3.html&gt;</a:t>
+            </a:r>
+          </a:p>
+        </p:txBody>
+      </p:sp>
+    </p:spTree>
+  </p:cSld>
+  <p:clrMapOvr>
+    <a:masterClrMapping/>
+  </p:clrMapOvr>
+</p:sld>
+</file>
+
+<file path=ppt/slides/slide15.xml><?xml version="1.0" encoding="utf-8"?>
+<p:sld xmlns:a="http://schemas.openxmlformats.org/drawingml/2006/main" xmlns:p="http://schemas.openxmlformats.org/presentationml/2006/main" xmlns:r="http://schemas.openxmlformats.org/officeDocument/2006/relationships">
+  <p:cSld>
+    <p:spTree>
+      <p:nvGrpSpPr>
+        <p:cNvPr id="1" name=""/>
+        <p:cNvGrpSpPr/>
+        <p:nvPr/>
+      </p:nvGrpSpPr>
+      <p:grpSpPr/>
+      <p:sp>
+        <p:nvSpPr>
+          <p:cNvPr id="2" name="TextBox 1"/>
+          <p:cNvSpPr txBox="1"/>
+          <p:nvPr/>
+        </p:nvSpPr>
+        <p:spPr>
+          <a:xfrm>
+            <a:off x="457200" y="274320"/>
+            <a:ext cx="8229600" cy="640080"/>
+          </a:xfrm>
+          <a:prstGeom prst="rect">
+            <a:avLst/>
+          </a:prstGeom>
+          <a:noFill/>
+        </p:spPr>
+        <p:txBody>
+          <a:bodyPr wrap="square">
+            <a:spAutoFit/>
+          </a:bodyPr>
+          <a:lstStyle/>
+          <a:p>
+            <a:r>
+              <a:rPr sz="2200" b="1">
+                <a:solidFill>
+                  <a:srgbClr val="0B3D2E"/>
+                </a:solidFill>
+              </a:rPr>
+              <a:t>Diagrama de la clase</a:t>
+            </a:r>
+          </a:p>
+        </p:txBody>
+      </p:sp>
+      <p:pic>
+        <p:nvPicPr>
+          <p:cNvPr id="3" name="Picture 2" descr="63d9c6b5f2c9f212.png"/>
+          <p:cNvPicPr>
+            <a:picLocks noChangeAspect="1"/>
+          </p:cNvPicPr>
+          <p:nvPr/>
+        </p:nvPicPr>
+        <p:blipFill>
+          <a:blip r:embed="rId2"/>
+          <a:stretch>
+            <a:fillRect/>
+          </a:stretch>
+        </p:blipFill>
+        <p:spPr>
+          <a:xfrm>
+            <a:off x="457200" y="2839212"/>
+            <a:ext cx="8229600" cy="1819656"/>
+          </a:xfrm>
+          <a:prstGeom prst="rect">
+            <a:avLst/>
+          </a:prstGeom>
+        </p:spPr>
+      </p:pic>
     </p:spTree>
   </p:cSld>
   <p:clrMapOvr>
@@ -3653,7 +4044,7 @@
                   <a:srgbClr val="22282E"/>
                 </a:solidFill>
               </a:rPr>
-              <a:t>•  Calcular subredes con soltura, algo que necesitarás constantemente para definir el alcance de un escaneo, segmentar una red o interpretar un rango objetivo. Al terminar sabrás pasar entre notación decimal, binaria y CIDR, calcular direcciones de red, broadcast, rango de hosts y dividir una red en subredes.</a:t>
+              <a:t>•  Calcular subredes con soltura, una destreza que necesitarás constantemente para definir el alcance de un escaneo, segmentar una red defensivamente o interpretar el rango de un objetivo. Al terminar…</a:t>
             </a:r>
           </a:p>
         </p:txBody>
@@ -3757,67 +4148,82 @@
                   <a:srgbClr val="22282E"/>
                 </a:solidFill>
               </a:rPr>
-              <a:t>•  Convertir direcciones IP entre decimal y binario.</a:t>
-            </a:r>
-          </a:p>
-          <a:p>
-            <a:pPr>
-              <a:spcAft>
-                <a:spcPts val="600"/>
-              </a:spcAft>
-            </a:pPr>
-            <a:r>
-              <a:rPr sz="1500">
-                <a:solidFill>
-                  <a:srgbClr val="22282E"/>
-                </a:solidFill>
-              </a:rPr>
-              <a:t>•  Interpretar máscaras de red y notación CIDR.</a:t>
-            </a:r>
-          </a:p>
-          <a:p>
-            <a:pPr>
-              <a:spcAft>
-                <a:spcPts val="600"/>
-              </a:spcAft>
-            </a:pPr>
-            <a:r>
-              <a:rPr sz="1500">
-                <a:solidFill>
-                  <a:srgbClr val="22282E"/>
-                </a:solidFill>
-              </a:rPr>
-              <a:t>•  Calcular red, broadcast, primer/último host y número de hosts.</a:t>
-            </a:r>
-          </a:p>
-          <a:p>
-            <a:pPr>
-              <a:spcAft>
-                <a:spcPts val="600"/>
-              </a:spcAft>
-            </a:pPr>
-            <a:r>
-              <a:rPr sz="1500">
-                <a:solidFill>
-                  <a:srgbClr val="22282E"/>
-                </a:solidFill>
-              </a:rPr>
-              <a:t>•  Dividir una red en subredes (subnetting/VLSM).</a:t>
-            </a:r>
-          </a:p>
-          <a:p>
-            <a:pPr>
-              <a:spcAft>
-                <a:spcPts val="600"/>
-              </a:spcAft>
-            </a:pPr>
-            <a:r>
-              <a:rPr sz="1500">
-                <a:solidFill>
-                  <a:srgbClr val="22282E"/>
-                </a:solidFill>
-              </a:rPr>
-              <a:t>•  Reconocer rangos privados, especiales y su relevancia en seguridad.</a:t>
+              <a:t>•  Convertir direcciones IP entre notación decimal y binaria con precisión.</a:t>
+            </a:r>
+          </a:p>
+          <a:p>
+            <a:pPr>
+              <a:spcAft>
+                <a:spcPts val="600"/>
+              </a:spcAft>
+            </a:pPr>
+            <a:r>
+              <a:rPr sz="1500">
+                <a:solidFill>
+                  <a:srgbClr val="22282E"/>
+                </a:solidFill>
+              </a:rPr>
+              <a:t>•  Interpretar máscaras de red y notación CIDR y traducir entre ambas.</a:t>
+            </a:r>
+          </a:p>
+          <a:p>
+            <a:pPr>
+              <a:spcAft>
+                <a:spcPts val="600"/>
+              </a:spcAft>
+            </a:pPr>
+            <a:r>
+              <a:rPr sz="1500">
+                <a:solidFill>
+                  <a:srgbClr val="22282E"/>
+                </a:solidFill>
+              </a:rPr>
+              <a:t>•  Calcular dirección de red, broadcast, primer y último host y número de hosts.</a:t>
+            </a:r>
+          </a:p>
+          <a:p>
+            <a:pPr>
+              <a:spcAft>
+                <a:spcPts val="600"/>
+              </a:spcAft>
+            </a:pPr>
+            <a:r>
+              <a:rPr sz="1500">
+                <a:solidFill>
+                  <a:srgbClr val="22282E"/>
+                </a:solidFill>
+              </a:rPr>
+              <a:t>•  Dividir una red en subredes de tamaño fijo (subnetting) y variable (VLSM).</a:t>
+            </a:r>
+          </a:p>
+          <a:p>
+            <a:pPr>
+              <a:spcAft>
+                <a:spcPts val="600"/>
+              </a:spcAft>
+            </a:pPr>
+            <a:r>
+              <a:rPr sz="1500">
+                <a:solidFill>
+                  <a:srgbClr val="22282E"/>
+                </a:solidFill>
+              </a:rPr>
+              <a:t>•  Reconocer rangos privados, especiales y reservados y su relevancia en seguridad.</a:t>
+            </a:r>
+          </a:p>
+          <a:p>
+            <a:pPr>
+              <a:spcAft>
+                <a:spcPts val="600"/>
+              </a:spcAft>
+            </a:pPr>
+            <a:r>
+              <a:rPr sz="1500">
+                <a:solidFill>
+                  <a:srgbClr val="22282E"/>
+                </a:solidFill>
+              </a:rPr>
+              <a:t>•  Diseñar un plan de direccionamiento sin solapamientos que optimice el espacio.</a:t>
             </a:r>
           </a:p>
         </p:txBody>
@@ -4047,7 +4453,7 @@
                   <a:srgbClr val="0B3D2E"/>
                 </a:solidFill>
               </a:rPr>
-              <a:t>📖 Definiciones y características</a:t>
+              <a:t>🧠 Explicación en profundidad</a:t>
             </a:r>
           </a:p>
         </p:txBody>
@@ -4085,82 +4491,97 @@
                   <a:srgbClr val="22282E"/>
                 </a:solidFill>
               </a:rPr>
-              <a:t>•  Máscara de red: patrón de bits que separa la porción de red de la de host. Clave: /24 = 255.255.255.0 = 24 bits de red.</a:t>
-            </a:r>
-          </a:p>
-          <a:p>
-            <a:pPr>
-              <a:spcAft>
-                <a:spcPts val="600"/>
-              </a:spcAft>
-            </a:pPr>
-            <a:r>
-              <a:rPr sz="1500">
-                <a:solidFill>
-                  <a:srgbClr val="22282E"/>
-                </a:solidFill>
-              </a:rPr>
-              <a:t>•  CIDR: notación IP/prefijo que reemplazó las clases A/B/C. Clave: permite prefijos arbitrarios y agregación de rutas.</a:t>
-            </a:r>
-          </a:p>
-          <a:p>
-            <a:pPr>
-              <a:spcAft>
-                <a:spcPts val="600"/>
-              </a:spcAft>
-            </a:pPr>
-            <a:r>
-              <a:rPr sz="1500">
-                <a:solidFill>
-                  <a:srgbClr val="22282E"/>
-                </a:solidFill>
-              </a:rPr>
-              <a:t>•  Dirección de red: primera del bloque, con todos los bits de host a 0. Clave: no se asigna a hosts.</a:t>
-            </a:r>
-          </a:p>
-          <a:p>
-            <a:pPr>
-              <a:spcAft>
-                <a:spcPts val="600"/>
-              </a:spcAft>
-            </a:pPr>
-            <a:r>
-              <a:rPr sz="1500">
-                <a:solidFill>
-                  <a:srgbClr val="22282E"/>
-                </a:solidFill>
-              </a:rPr>
-              <a:t>•  Broadcast: última del bloque, con todos los bits de host a 1. Clave: tampoco es asignable.</a:t>
-            </a:r>
-          </a:p>
-          <a:p>
-            <a:pPr>
-              <a:spcAft>
-                <a:spcPts val="600"/>
-              </a:spcAft>
-            </a:pPr>
-            <a:r>
-              <a:rPr sz="1500">
-                <a:solidFill>
-                  <a:srgbClr val="22282E"/>
-                </a:solidFill>
-              </a:rPr>
-              <a:t>•  Hosts utilizables: 2^(bits de host) − 2. Clave: se restan red y broadcast (salvo /31, /32).</a:t>
-            </a:r>
-          </a:p>
-          <a:p>
-            <a:pPr>
-              <a:spcAft>
-                <a:spcPts val="600"/>
-              </a:spcAft>
-            </a:pPr>
-            <a:r>
-              <a:rPr sz="1500">
-                <a:solidFill>
-                  <a:srgbClr val="22282E"/>
-                </a:solidFill>
-              </a:rPr>
-              <a:t>•  Rangos privados (RFC 1918): 10/8, 172.16/12, 192.168/16. Clave: no enrutables en Internet; típicos de laboratorios y LAN.</a:t>
+              <a:t>•  Una dirección IPv4 son 32 bits que solemos escribir en cuatro octetos decimales (192.168.10.5), pero todo el cálculo de subredes ocurre en binario. Cada octeto representa 8 bits, con valores de…</a:t>
+            </a:r>
+          </a:p>
+          <a:p>
+            <a:pPr>
+              <a:spcAft>
+                <a:spcPts val="600"/>
+              </a:spcAft>
+            </a:pPr>
+            <a:r>
+              <a:rPr sz="1500">
+                <a:solidFill>
+                  <a:srgbClr val="22282E"/>
+                </a:solidFill>
+              </a:rPr>
+              <a:t>•  La máscara de red es un patrón de 32 bits donde los bits a 1 marcan la porción de red y los bits a 0 la porción de host. La notación CIDR (Classless Inter-Domain Routing) resume la máscara contando…</a:t>
+            </a:r>
+          </a:p>
+          <a:p>
+            <a:pPr>
+              <a:spcAft>
+                <a:spcPts val="600"/>
+              </a:spcAft>
+            </a:pPr>
+            <a:r>
+              <a:rPr sz="1500">
+                <a:solidFill>
+                  <a:srgbClr val="22282E"/>
+                </a:solidFill>
+              </a:rPr>
+              <a:t>•  El prefijo /26 marca dónde cae la frontera: los 26 bits de la izquierda son</a:t>
+            </a:r>
+          </a:p>
+          <a:p>
+            <a:pPr>
+              <a:spcAft>
+                <a:spcPts val="600"/>
+              </a:spcAft>
+            </a:pPr>
+            <a:r>
+              <a:rPr sz="1500">
+                <a:solidFill>
+                  <a:srgbClr val="22282E"/>
+                </a:solidFill>
+              </a:rPr>
+              <a:t>•  inmutables dentro de la subred y los 6 de la derecha son el espacio de hosts. De ahí</a:t>
+            </a:r>
+          </a:p>
+          <a:p>
+            <a:pPr>
+              <a:spcAft>
+                <a:spcPts val="600"/>
+              </a:spcAft>
+            </a:pPr>
+            <a:r>
+              <a:rPr sz="1500">
+                <a:solidFill>
+                  <a:srgbClr val="22282E"/>
+                </a:solidFill>
+              </a:rPr>
+              <a:t>•  salen las cuatro cifras que se calculan siempre: 2⁶ = 64 direcciones totales, 62</a:t>
+            </a:r>
+          </a:p>
+          <a:p>
+            <a:pPr>
+              <a:spcAft>
+                <a:spcPts val="600"/>
+              </a:spcAft>
+            </a:pPr>
+            <a:r>
+              <a:rPr sz="1500">
+                <a:solidFill>
+                  <a:srgbClr val="22282E"/>
+                </a:solidFill>
+              </a:rPr>
+              <a:t>•  utilizables (se restan red y broadcast), primer host = red + 1 y último host =</a:t>
+            </a:r>
+          </a:p>
+          <a:p>
+            <a:pPr>
+              <a:spcAft>
+                <a:spcPts val="600"/>
+              </a:spcAft>
+            </a:pPr>
+            <a:r>
+              <a:rPr sz="1500">
+                <a:solidFill>
+                  <a:srgbClr val="22282E"/>
+                </a:solidFill>
+              </a:rPr>
+              <a:t>•  broadcast − 1.</a:t>
             </a:r>
           </a:p>
         </p:txBody>
@@ -4211,7 +4632,7 @@
                   <a:srgbClr val="0B3D2E"/>
                 </a:solidFill>
               </a:rPr>
-              <a:t>🧰 Herramientas y preparación</a:t>
+              <a:t>📖 Definiciones y características</a:t>
             </a:r>
           </a:p>
         </p:txBody>
@@ -4249,37 +4670,97 @@
                   <a:srgbClr val="22282E"/>
                 </a:solidFill>
               </a:rPr>
-              <a:t>•  Bastan papel y lápiz para aprender de verdad. Para verificar: ipcalc (Linux), sipcalc, o la calculadora del sistema en modo programador. En Kali:</a:t>
-            </a:r>
-          </a:p>
-          <a:p>
-            <a:pPr>
-              <a:spcAft>
-                <a:spcPts val="600"/>
-              </a:spcAft>
-            </a:pPr>
-            <a:r>
-              <a:rPr sz="1500">
-                <a:solidFill>
-                  <a:srgbClr val="22282E"/>
-                </a:solidFill>
-              </a:rPr>
-              <a:t>•  sudo apt install ipcalc sipcalc</a:t>
-            </a:r>
-          </a:p>
-          <a:p>
-            <a:pPr>
-              <a:spcAft>
-                <a:spcPts val="600"/>
-              </a:spcAft>
-            </a:pPr>
-            <a:r>
-              <a:rPr sz="1500">
-                <a:solidFill>
-                  <a:srgbClr val="22282E"/>
-                </a:solidFill>
-              </a:rPr>
-              <a:t>•  Evita depender de calculadoras online al principio: el objetivo es entender el cálculo, no automatizarlo.</a:t>
+              <a:t>•  Máscara de red: patrón de 32 bits que separa la porción de red (bits a 1) de la de host (bits a 0). /24 equivale a 255.255.255.0, es decir 24 bits de red.</a:t>
+            </a:r>
+          </a:p>
+          <a:p>
+            <a:pPr>
+              <a:spcAft>
+                <a:spcPts val="600"/>
+              </a:spcAft>
+            </a:pPr>
+            <a:r>
+              <a:rPr sz="1500">
+                <a:solidFill>
+                  <a:srgbClr val="22282E"/>
+                </a:solidFill>
+              </a:rPr>
+              <a:t>•  CIDR: notación IP/prefijo que reemplazó las clases A/B/C. Permite prefijos arbitrarios y la agregación de rutas, optimizando el uso del espacio de direcciones.</a:t>
+            </a:r>
+          </a:p>
+          <a:p>
+            <a:pPr>
+              <a:spcAft>
+                <a:spcPts val="600"/>
+              </a:spcAft>
+            </a:pPr>
+            <a:r>
+              <a:rPr sz="1500">
+                <a:solidFill>
+                  <a:srgbClr val="22282E"/>
+                </a:solidFill>
+              </a:rPr>
+              <a:t>•  Dirección de red: primera dirección del bloque, con todos los bits de host a 0. Identifica el segmento y no se asigna a ningún host.</a:t>
+            </a:r>
+          </a:p>
+          <a:p>
+            <a:pPr>
+              <a:spcAft>
+                <a:spcPts val="600"/>
+              </a:spcAft>
+            </a:pPr>
+            <a:r>
+              <a:rPr sz="1500">
+                <a:solidFill>
+                  <a:srgbClr val="22282E"/>
+                </a:solidFill>
+              </a:rPr>
+              <a:t>•  Dirección de broadcast: última dirección del bloque, con todos los bits de host a 1. Alcanza a todos los hosts del segmento y tampoco es asignable.</a:t>
+            </a:r>
+          </a:p>
+          <a:p>
+            <a:pPr>
+              <a:spcAft>
+                <a:spcPts val="600"/>
+              </a:spcAft>
+            </a:pPr>
+            <a:r>
+              <a:rPr sz="1500">
+                <a:solidFill>
+                  <a:srgbClr val="22282E"/>
+                </a:solidFill>
+              </a:rPr>
+              <a:t>•  Hosts utilizables: número de direcciones asignables, igual a 2^(bits de host) − 2, porque se restan red y broadcast (salvo en /31 y /32).</a:t>
+            </a:r>
+          </a:p>
+          <a:p>
+            <a:pPr>
+              <a:spcAft>
+                <a:spcPts val="600"/>
+              </a:spcAft>
+            </a:pPr>
+            <a:r>
+              <a:rPr sz="1500">
+                <a:solidFill>
+                  <a:srgbClr val="22282E"/>
+                </a:solidFill>
+              </a:rPr>
+              <a:t>•  Subnetting: proceso de dividir una red tomando bits de host para crear subredes iguales, a costa de flexibilidad.</a:t>
+            </a:r>
+          </a:p>
+          <a:p>
+            <a:pPr>
+              <a:spcAft>
+                <a:spcPts val="600"/>
+              </a:spcAft>
+            </a:pPr>
+            <a:r>
+              <a:rPr sz="1500">
+                <a:solidFill>
+                  <a:srgbClr val="22282E"/>
+                </a:solidFill>
+              </a:rPr>
+              <a:t>•  VLSM: Variable Length Subnet Masking; asigna a cada segmento la máscara mínima que cubre sus hosts, evitando el desperdicio del tamaño fijo.</a:t>
             </a:r>
           </a:p>
         </p:txBody>
@@ -4330,7 +4811,7 @@
                   <a:srgbClr val="0B3D2E"/>
                 </a:solidFill>
               </a:rPr>
-              <a:t>🧪 Laboratorio guiado</a:t>
+              <a:t>📔 Glosario</a:t>
             </a:r>
           </a:p>
         </p:txBody>
@@ -4368,97 +4849,97 @@
                   <a:srgbClr val="22282E"/>
                 </a:solidFill>
               </a:rPr>
-              <a:t>•  Decimal a binario. Convierte a mano 192.168.10.0 y 255.255.255.192 a binario. Verifica:</a:t>
-            </a:r>
-          </a:p>
-          <a:p>
-            <a:pPr>
-              <a:spcAft>
-                <a:spcPts val="600"/>
-              </a:spcAft>
-            </a:pPr>
-            <a:r>
-              <a:rPr sz="1500">
-                <a:solidFill>
-                  <a:srgbClr val="22282E"/>
-                </a:solidFill>
-              </a:rPr>
-              <a:t>•  ipcalc 192.168.10.0/26</a:t>
-            </a:r>
-          </a:p>
-          <a:p>
-            <a:pPr>
-              <a:spcAft>
-                <a:spcPts val="600"/>
-              </a:spcAft>
-            </a:pPr>
-            <a:r>
-              <a:rPr sz="1500">
-                <a:solidFill>
-                  <a:srgbClr val="22282E"/>
-                </a:solidFill>
-              </a:rPr>
-              <a:t>•  Analiza un bloque /24. Para 10.10.10.0/24 determina: máscara, dirección de red, broadcast, primer y último host, número de hosts.</a:t>
-            </a:r>
-          </a:p>
-          <a:p>
-            <a:pPr>
-              <a:spcAft>
-                <a:spcPts val="600"/>
-              </a:spcAft>
-            </a:pPr>
-            <a:r>
-              <a:rPr sz="1500">
-                <a:solidFill>
-                  <a:srgbClr val="22282E"/>
-                </a:solidFill>
-              </a:rPr>
-              <a:t>•  Subnetear. Divide 192.168.1.0/24 en 4 subredes iguales (/26). Escribe para cada una: red, rango de hosts y broadcast.</a:t>
-            </a:r>
-          </a:p>
-          <a:p>
-            <a:pPr>
-              <a:spcAft>
-                <a:spcPts val="600"/>
-              </a:spcAft>
-            </a:pPr>
-            <a:r>
-              <a:rPr sz="1500">
-                <a:solidFill>
-                  <a:srgbClr val="22282E"/>
-                </a:solidFill>
-              </a:rPr>
-              <a:t>•  Verifica con la herramienta:</a:t>
-            </a:r>
-          </a:p>
-          <a:p>
-            <a:pPr>
-              <a:spcAft>
-                <a:spcPts val="600"/>
-              </a:spcAft>
-            </a:pPr>
-            <a:r>
-              <a:rPr sz="1500">
-                <a:solidFill>
-                  <a:srgbClr val="22282E"/>
-                </a:solidFill>
-              </a:rPr>
-              <a:t>•  ipcalc 192.168.1.0/24 -s 62 62 62 62</a:t>
-            </a:r>
-          </a:p>
-          <a:p>
-            <a:pPr>
-              <a:spcAft>
-                <a:spcPts val="600"/>
-              </a:spcAft>
-            </a:pPr>
-            <a:r>
-              <a:rPr sz="1500">
-                <a:solidFill>
-                  <a:srgbClr val="22282E"/>
-                </a:solidFill>
-              </a:rPr>
-              <a:t>•  sipcalc 192.168.1.0/26</a:t>
+              <a:t>•  Término — Definición concisa</a:t>
+            </a:r>
+          </a:p>
+          <a:p>
+            <a:pPr>
+              <a:spcAft>
+                <a:spcPts val="600"/>
+              </a:spcAft>
+            </a:pPr>
+            <a:r>
+              <a:rPr sz="1500">
+                <a:solidFill>
+                  <a:srgbClr val="22282E"/>
+                </a:solidFill>
+              </a:rPr>
+              <a:t>•  IPv4 — Dirección de 32 bits escrita en cuatro octetos decimales.</a:t>
+            </a:r>
+          </a:p>
+          <a:p>
+            <a:pPr>
+              <a:spcAft>
+                <a:spcPts val="600"/>
+              </a:spcAft>
+            </a:pPr>
+            <a:r>
+              <a:rPr sz="1500">
+                <a:solidFill>
+                  <a:srgbClr val="22282E"/>
+                </a:solidFill>
+              </a:rPr>
+              <a:t>•  Octeto — Grupo de 8 bits; cada uno de los cuatro números de una IPv4.</a:t>
+            </a:r>
+          </a:p>
+          <a:p>
+            <a:pPr>
+              <a:spcAft>
+                <a:spcPts val="600"/>
+              </a:spcAft>
+            </a:pPr>
+            <a:r>
+              <a:rPr sz="1500">
+                <a:solidFill>
+                  <a:srgbClr val="22282E"/>
+                </a:solidFill>
+              </a:rPr>
+              <a:t>•  Máscara — Patrón que distingue los bits de red de los de host.</a:t>
+            </a:r>
+          </a:p>
+          <a:p>
+            <a:pPr>
+              <a:spcAft>
+                <a:spcPts val="600"/>
+              </a:spcAft>
+            </a:pPr>
+            <a:r>
+              <a:rPr sz="1500">
+                <a:solidFill>
+                  <a:srgbClr val="22282E"/>
+                </a:solidFill>
+              </a:rPr>
+              <a:t>•  CIDR — Notación IP/prefijo que indica cuántos bits son de red.</a:t>
+            </a:r>
+          </a:p>
+          <a:p>
+            <a:pPr>
+              <a:spcAft>
+                <a:spcPts val="600"/>
+              </a:spcAft>
+            </a:pPr>
+            <a:r>
+              <a:rPr sz="1500">
+                <a:solidFill>
+                  <a:srgbClr val="22282E"/>
+                </a:solidFill>
+              </a:rPr>
+              <a:t>•  Prefijo — Número de bits de red en notación CIDR (por ejemplo /26).</a:t>
+            </a:r>
+          </a:p>
+          <a:p>
+            <a:pPr>
+              <a:spcAft>
+                <a:spcPts val="600"/>
+              </a:spcAft>
+            </a:pPr>
+            <a:r>
+              <a:rPr sz="1500">
+                <a:solidFill>
+                  <a:srgbClr val="22282E"/>
+                </a:solidFill>
+              </a:rPr>
+              <a:t>•  Dirección de red — Primera dirección del bloque; identifica el segmento.</a:t>
             </a:r>
           </a:p>
         </p:txBody>
@@ -4509,7 +4990,7 @@
                   <a:srgbClr val="0B3D2E"/>
                 </a:solidFill>
               </a:rPr>
-              <a:t>✍️ Ejercicios</a:t>
+              <a:t>🧰 Herramientas y preparación</a:t>
             </a:r>
           </a:p>
         </p:txBody>
@@ -4547,82 +5028,22 @@
                   <a:srgbClr val="22282E"/>
                 </a:solidFill>
               </a:rPr>
-              <a:t>•  ¿Cuántos hosts utilizables tiene un /22? ¿Y un /30?</a:t>
-            </a:r>
-          </a:p>
-          <a:p>
-            <a:pPr>
-              <a:spcAft>
-                <a:spcPts val="600"/>
-              </a:spcAft>
-            </a:pPr>
-            <a:r>
-              <a:rPr sz="1500">
-                <a:solidFill>
-                  <a:srgbClr val="22282E"/>
-                </a:solidFill>
-              </a:rPr>
-              <a:t>•  Para 10.20.30.45/27, calcula la dirección de red y el broadcast.</a:t>
-            </a:r>
-          </a:p>
-          <a:p>
-            <a:pPr>
-              <a:spcAft>
-                <a:spcPts val="600"/>
-              </a:spcAft>
-            </a:pPr>
-            <a:r>
-              <a:rPr sz="1500">
-                <a:solidFill>
-                  <a:srgbClr val="22282E"/>
-                </a:solidFill>
-              </a:rPr>
-              <a:t>•  Divide 192.168.100.0/24 en 8 subredes; da la 3ª subred completa.</a:t>
-            </a:r>
-          </a:p>
-          <a:p>
-            <a:pPr>
-              <a:spcAft>
-                <a:spcPts val="600"/>
-              </a:spcAft>
-            </a:pPr>
-            <a:r>
-              <a:rPr sz="1500">
-                <a:solidFill>
-                  <a:srgbClr val="22282E"/>
-                </a:solidFill>
-              </a:rPr>
-              <a:t>•  Diseña con VLSM un plan para 3 departamentos de 60, 30 y 10 hosts partiendo de un /24.</a:t>
-            </a:r>
-          </a:p>
-          <a:p>
-            <a:pPr>
-              <a:spcAft>
-                <a:spcPts val="600"/>
-              </a:spcAft>
-            </a:pPr>
-            <a:r>
-              <a:rPr sz="1500">
-                <a:solidFill>
-                  <a:srgbClr val="22282E"/>
-                </a:solidFill>
-              </a:rPr>
-              <a:t>•  Explica por qué un /31 puede usarse en enlaces punto a punto pese a la regla −2.</a:t>
-            </a:r>
-          </a:p>
-          <a:p>
-            <a:pPr>
-              <a:spcAft>
-                <a:spcPts val="600"/>
-              </a:spcAft>
-            </a:pPr>
-            <a:r>
-              <a:rPr sz="1500">
-                <a:solidFill>
-                  <a:srgbClr val="22282E"/>
-                </a:solidFill>
-              </a:rPr>
-              <a:t>•  Determina si 192.168.5.130 y 192.168.5.200 están en la misma subred /26.</a:t>
+              <a:t>•  Al principio, bastan papel y lápiz: el objetivo es entender el cálculo, no automatizarlo. Para verificar tus resultados usa ipcalc (Linux), sipcalc o la calculadora del sistema en modo programador.…</a:t>
+            </a:r>
+          </a:p>
+          <a:p>
+            <a:pPr>
+              <a:spcAft>
+                <a:spcPts val="600"/>
+              </a:spcAft>
+            </a:pPr>
+            <a:r>
+              <a:rPr sz="1500">
+                <a:solidFill>
+                  <a:srgbClr val="22282E"/>
+                </a:solidFill>
+              </a:rPr>
+              <a:t>•  Evita apoyarte en calculadoras online mientras aprendes: durante un pentest necesitarás razonar rangos al vuelo, sin conexión, y detectar cuándo una herramienta te da un resultado incoherente. La…</a:t>
             </a:r>
           </a:p>
         </p:txBody>
@@ -4673,7 +5094,7 @@
                   <a:srgbClr val="0B3D2E"/>
                 </a:solidFill>
               </a:rPr>
-              <a:t>📝 Reto verificable</a:t>
+              <a:t>🧪 Laboratorio guiado</a:t>
             </a:r>
           </a:p>
         </p:txBody>
@@ -4711,22 +5132,82 @@
                   <a:srgbClr val="22282E"/>
                 </a:solidFill>
               </a:rPr>
-              <a:t>•  Diseña un plan de direccionamiento para una organización ficticia con cuatro segmentos de distinto tamaño (por ejemplo 200, 60, 12 y un enlace WAN) partiendo de un único bloque /23, usando VLSM para no desperdiciar direcciones. Entrega una tabla con red, máscara, rango de hosts y broadcast de cada segmento.</a:t>
-            </a:r>
-          </a:p>
-          <a:p>
-            <a:pPr>
-              <a:spcAft>
-                <a:spcPts val="600"/>
-              </a:spcAft>
-            </a:pPr>
-            <a:r>
-              <a:rPr sz="1500">
-                <a:solidFill>
-                  <a:srgbClr val="22282E"/>
-                </a:solidFill>
-              </a:rPr>
-              <a:t>•  Criterio de aceptación: las subredes no se solapan, cada una tiene la máscara mínima que satisface su número de hosts, y la suma cabe en el /23 asignado. Verificable con ipcalc/sipcalc sobre cada subred de la tabla.</a:t>
+              <a:t>•  Decimal a binario. Convierte a mano 192.168.10.0 y 255.255.255.192 a binario, y luego verifica:</a:t>
+            </a:r>
+          </a:p>
+          <a:p>
+            <a:pPr>
+              <a:spcAft>
+                <a:spcPts val="600"/>
+              </a:spcAft>
+            </a:pPr>
+            <a:r>
+              <a:rPr sz="1500">
+                <a:solidFill>
+                  <a:srgbClr val="22282E"/>
+                </a:solidFill>
+              </a:rPr>
+              <a:t>•  Analiza un bloque /24. Para 10.10.10.0/24 determina a mano: máscara, dirección de red, broadcast, primer y último host y número de hosts.</a:t>
+            </a:r>
+          </a:p>
+          <a:p>
+            <a:pPr>
+              <a:spcAft>
+                <a:spcPts val="600"/>
+              </a:spcAft>
+            </a:pPr>
+            <a:r>
+              <a:rPr sz="1500">
+                <a:solidFill>
+                  <a:srgbClr val="22282E"/>
+                </a:solidFill>
+              </a:rPr>
+              <a:t>•  Subnetear en tamaño fijo. Divide 192.168.1.0/24 en 4 subredes iguales (/26). Escribe para cada una red, rango de hosts y broadcast.</a:t>
+            </a:r>
+          </a:p>
+          <a:p>
+            <a:pPr>
+              <a:spcAft>
+                <a:spcPts val="600"/>
+              </a:spcAft>
+            </a:pPr>
+            <a:r>
+              <a:rPr sz="1500">
+                <a:solidFill>
+                  <a:srgbClr val="22282E"/>
+                </a:solidFill>
+              </a:rPr>
+              <a:t>•  Verifica con la herramienta:</a:t>
+            </a:r>
+          </a:p>
+          <a:p>
+            <a:pPr>
+              <a:spcAft>
+                <a:spcPts val="600"/>
+              </a:spcAft>
+            </a:pPr>
+            <a:r>
+              <a:rPr sz="1500">
+                <a:solidFill>
+                  <a:srgbClr val="22282E"/>
+                </a:solidFill>
+              </a:rPr>
+              <a:t>•  VLSM. Dado 172.16.0.0/16, diseña subredes para 500, 100 y 25 hosts y un enlace punto a punto (2 hosts). Elige la máscara mínima adecuada para cada una y ordénalas de mayor a menor.</a:t>
+            </a:r>
+          </a:p>
+          <a:p>
+            <a:pPr>
+              <a:spcAft>
+                <a:spcPts val="600"/>
+              </a:spcAft>
+            </a:pPr>
+            <a:r>
+              <a:rPr sz="1500">
+                <a:solidFill>
+                  <a:srgbClr val="22282E"/>
+                </a:solidFill>
+              </a:rPr>
+              <a:t>•  Rangos especiales. Clasifica 127.0.0.1, 169.254.5.5, 10.0.0.1 y 8.8.8.8 indicando cuáles son públicos, privados, loopback o APIPA.</a:t>
             </a:r>
           </a:p>
         </p:txBody>
